--- a/docs/Right-Fit-Homes-Pitch.pptx
+++ b/docs/Right-Fit-Homes-Pitch.pptx
@@ -122,13 +122,13 @@
   <p:extLst>
     <p:ext uri="{521415D9-36F7-43E2-AB2F-B90AF26B5E84}">
       <p14:sectionLst xmlns:p14="http://schemas.microsoft.com/office/powerpoint/2010/main">
-        <p14:section name="Opening" id="{8ee521ca-c901-e854-2f28-353b46c8b248}">
+        <p14:section name="Opening" id="{a27b64a4-bb29-2a0b-16d7-0aa5c262fa1d}">
           <p14:sldIdLst>
             <p14:sldId id="256"/>
             <p14:sldId id="257"/>
           </p14:sldIdLst>
         </p14:section>
-        <p14:section name="The Story" id="{c194b8f0-1ef0-c526-488d-daa0afeb7547}">
+        <p14:section name="The Story" id="{8240e8ae-7d3c-c1eb-ee89-88637ec0cf40}">
           <p14:sldIdLst>
             <p14:sldId id="258"/>
             <p14:sldId id="259"/>
@@ -136,7 +136,7 @@
             <p14:sldId id="261"/>
           </p14:sldIdLst>
         </p14:section>
-        <p14:section name="The Proof" id="{3cb94ee4-3c0b-25a9-0877-8447c76f0748}">
+        <p14:section name="The Proof" id="{ce133c75-2de2-dc97-86aa-af2f8163edfd}">
           <p14:sldIdLst>
             <p14:sldId id="262"/>
             <p14:sldId id="263"/>
@@ -146,12 +146,12 @@
             <p14:sldId id="267"/>
           </p14:sldIdLst>
         </p14:section>
-        <p14:section name="Close" id="{78e234a6-967e-287a-18bb-06635b97d3ce}">
+        <p14:section name="Close" id="{e11f0ccf-35f0-05fc-b61a-fe72ef9a51a0}">
           <p14:sldIdLst>
             <p14:sldId id="268"/>
           </p14:sldIdLst>
         </p14:section>
-        <p14:section name="Appendix" id="{d8b07612-a5a3-1191-9644-a13cce556042}">
+        <p14:section name="Appendix" id="{3c89a51c-5846-c647-af8b-74abab6adf15}">
           <p14:sldIdLst>
             <p14:sldId id="269"/>
             <p14:sldId id="270"/>
@@ -2490,7 +2490,7 @@
           <a:p>
             <a:r>
               <a:rPr lang="en-US" dirty="0"/>
-              <a:t>For a pilot of 100 terraces: of 71.6 tonnes that owners would rip out, 56 tonnes are never installed and 4 more are rehomed. That is 84%. 46.6 tonnes of CO2e never released. SDP gains about RM148,000 after running costs and pays back after 36 homes, and buyers keep RM411,000. Every input is shown, so you can question one number without rejecting the idea.</a:t>
+              <a:t>We project that for a pilot of 100 terraces, of 71.6 tonnes that owners would rip out, 56 tonnes are never installed and 4 more are rehomed. That is 84%, if Neighbour Match rehomes half of what is still removed, our target for a pilot. 46.6 tonnes of CO2e never released. SDP gains about RM148,000 after running costs and pays back after 36 homes, and buyers keep RM411,000. Every input is shown, so you can question one number without rejecting the idea.</a:t>
             </a:r>
             <a:endParaRPr lang="en-US" dirty="0"/>
           </a:p>
@@ -5282,7 +5282,7 @@
                   <a:schemeClr val="tx1"/>
                 </a:solidFill>
               </a:rPr>
-              <a:t>of rip-out waste avoided in a 100-home pilot</a:t>
+              <a:t>of rip-out waste avoided, projected for a 100-home pilot</a:t>
             </a:r>
             <a:endParaRPr lang="en-US" sz="1300" dirty="0"/>
           </a:p>
@@ -7565,7 +7565,7 @@
                           <a:ea typeface="Century Gothic" pitchFamily="34" charset="-122"/>
                           <a:cs typeface="Century Gothic" pitchFamily="34" charset="-120"/>
                         </a:rPr>
-                        <a:t>56.2 t never installed + 4.0 t rehomed (assumption: Neighbour Match rehomes 50% of reusable fittings still removed)</a:t>
+                        <a:t>56.2 t never installed + 4.0 t rehomed (target: Neighbour Match rehomes 50% of reusable fittings still removed; the demo data rehomes 3% so far)</a:t>
                       </a:r>
                       <a:endParaRPr lang="en-US" sz="1200" dirty="0">
                         <a:latin typeface="Century Gothic" charset="0"/>
@@ -12435,7 +12435,7 @@
                   <a:schemeClr val="tx2"/>
                 </a:solidFill>
               </a:rPr>
-              <a:t>AI turns owners' messy notes into a rip-out index for each house design.</a:t>
+              <a:t>AI sorts owners' messy notes into fittings; the app counts them into a rip-out index.</a:t>
             </a:r>
             <a:endParaRPr lang="en-US" sz="1300" dirty="0"/>
           </a:p>
@@ -14536,7 +14536,7 @@
                           <a:ea typeface="Century Gothic" pitchFamily="34" charset="-122"/>
                           <a:cs typeface="Century Gothic" pitchFamily="34" charset="-120"/>
                         </a:rPr>
-                        <a:t>Counted only where 30%+ of owners remove it, net of delivery trips, working shown</a:t>
+                        <a:t>Counted only for fittings owners would really rip out, net of delivery trips, working shown</a:t>
                       </a:r>
                       <a:endParaRPr lang="en-US" sz="1400" dirty="0">
                         <a:latin typeface="Century Gothic" charset="0"/>
@@ -16042,7 +16042,7 @@
                   <a:schemeClr val="tx2"/>
                 </a:solidFill>
               </a:rPr>
-              <a:t>In a 100-home pilot, 84% of the rip-out waste never happens</a:t>
+              <a:t>Projected for a 100-home pilot: 84% of the rip-out waste never happens</a:t>
             </a:r>
             <a:endParaRPr lang="en-US" sz="1800" dirty="0"/>
           </a:p>
@@ -16490,7 +16490,7 @@
                   <a:schemeClr val="tx2"/>
                 </a:solidFill>
               </a:rPr>
-              <a:t>100 double-storey terraces at the What-if page's defaults: buyers choose for 80% of would-be rip-outs, 40% of them upgrade, and Neighbour Match rehomes half of what is still removed. Simulated rip-out rates; fitting figures from public sources. Working in appendix B.</a:t>
+              <a:t>100 terraces at the What-if page's defaults: buyers choose for 80% of would-be rip-outs, 40% of them upgrade, and Neighbour Match rehomes half of the rest (a pilot target; the demo data rehomes 3% so far). Simulated rip-out rates, public fitting figures; working in appendix B.</a:t>
             </a:r>
             <a:endParaRPr lang="en-US" sz="1100" dirty="0"/>
           </a:p>

--- a/docs/Right-Fit-Homes-Pitch.pptx
+++ b/docs/Right-Fit-Homes-Pitch.pptx
@@ -122,13 +122,13 @@
   <p:extLst>
     <p:ext uri="{521415D9-36F7-43E2-AB2F-B90AF26B5E84}">
       <p14:sectionLst xmlns:p14="http://schemas.microsoft.com/office/powerpoint/2010/main">
-        <p14:section name="Opening" id="{a27b64a4-bb29-2a0b-16d7-0aa5c262fa1d}">
+        <p14:section name="Opening" id="{3d1b3904-f432-8c1a-f0ad-4f9c56a51eb3}">
           <p14:sldIdLst>
             <p14:sldId id="256"/>
             <p14:sldId id="257"/>
           </p14:sldIdLst>
         </p14:section>
-        <p14:section name="The Story" id="{8240e8ae-7d3c-c1eb-ee89-88637ec0cf40}">
+        <p14:section name="The Story" id="{9f0bfc75-1657-54dd-9789-45f361102bc1}">
           <p14:sldIdLst>
             <p14:sldId id="258"/>
             <p14:sldId id="259"/>
@@ -136,7 +136,7 @@
             <p14:sldId id="261"/>
           </p14:sldIdLst>
         </p14:section>
-        <p14:section name="The Proof" id="{ce133c75-2de2-dc97-86aa-af2f8163edfd}">
+        <p14:section name="The Proof" id="{d026b8e0-a722-d053-a504-db776c9f24bd}">
           <p14:sldIdLst>
             <p14:sldId id="262"/>
             <p14:sldId id="263"/>
@@ -146,12 +146,12 @@
             <p14:sldId id="267"/>
           </p14:sldIdLst>
         </p14:section>
-        <p14:section name="Close" id="{e11f0ccf-35f0-05fc-b61a-fe72ef9a51a0}">
+        <p14:section name="Close" id="{a9574708-41b8-cb0b-70ee-cce0d48b5a61}">
           <p14:sldIdLst>
             <p14:sldId id="268"/>
           </p14:sldIdLst>
         </p14:section>
-        <p14:section name="Appendix" id="{3c89a51c-5846-c647-af8b-74abab6adf15}">
+        <p14:section name="Appendix" id="{4f283938-3d40-8a75-9474-05dd9ff9bbf5}">
           <p14:sldIdLst>
             <p14:sldId id="269"/>
             <p14:sldId id="270"/>
@@ -8505,926 +8505,30 @@
           </a:p>
         </p:txBody>
       </p:sp>
-      <p:sp>
-        <p:nvSpPr>
-          <p:cNvPr id="3" name="Message"/>
-          <p:cNvSpPr txBox="1"/>
-          <p:nvPr/>
-        </p:nvSpPr>
-        <p:spPr>
-          <a:xfrm>
-            <a:off x="777240" y="1325880"/>
-            <a:ext cx="9418320" cy="457200"/>
-          </a:xfrm>
-          <a:prstGeom prst="rect">
-            <a:avLst/>
-          </a:prstGeom>
-          <a:noFill/>
-          <a:ln/>
-        </p:spPr>
-        <p:txBody>
-          <a:bodyPr wrap="square" lIns="0" tIns="0" rIns="0" bIns="0" rtlCol="0" anchor="ctr"/>
-          <a:lstStyle/>
-          <a:p>
-            <a:pPr indent="0" marL="0">
-              <a:buNone/>
-            </a:pPr>
-            <a:r>
-              <a:rPr lang="en-US" sz="1800" dirty="0">
-                <a:solidFill>
-                  <a:schemeClr val="tx2"/>
-                </a:solidFill>
-              </a:rPr>
-              <a:t>Four layers, each talking only to the one below</a:t>
-            </a:r>
-            <a:endParaRPr lang="en-US" sz="1800" dirty="0"/>
-          </a:p>
-        </p:txBody>
-      </p:sp>
-      <p:sp>
-        <p:nvSpPr>
-          <p:cNvPr id="4" name="Pages layer"/>
-          <p:cNvSpPr/>
-          <p:nvPr/>
-        </p:nvSpPr>
-        <p:spPr>
-          <a:xfrm>
-            <a:off x="777240" y="2103120"/>
-            <a:ext cx="6949440" cy="822960"/>
-          </a:xfrm>
-          <a:prstGeom prst="roundRect">
-            <a:avLst>
-              <a:gd name="adj" fmla="val 13333"/>
-            </a:avLst>
-          </a:prstGeom>
-          <a:solidFill>
-            <a:schemeClr val="bg2"/>
-          </a:solidFill>
-          <a:ln w="12700">
-            <a:solidFill>
-              <a:schemeClr val="bg2"/>
-            </a:solidFill>
-            <a:prstDash val="solid"/>
-          </a:ln>
-        </p:spPr>
-      </p:sp>
-      <p:sp>
-        <p:nvSpPr>
-          <p:cNvPr id="5" name="Pages"/>
-          <p:cNvSpPr txBox="1"/>
-          <p:nvPr/>
-        </p:nvSpPr>
-        <p:spPr>
-          <a:xfrm>
-            <a:off x="1005840" y="2194560"/>
-            <a:ext cx="6492240" cy="320040"/>
-          </a:xfrm>
-          <a:prstGeom prst="rect">
-            <a:avLst/>
-          </a:prstGeom>
-          <a:noFill/>
-          <a:ln/>
-        </p:spPr>
-        <p:txBody>
-          <a:bodyPr wrap="square" lIns="0" tIns="0" rIns="0" bIns="0" rtlCol="0" anchor="t"/>
-          <a:lstStyle/>
-          <a:p>
-            <a:pPr indent="0" marL="0">
-              <a:buNone/>
-            </a:pPr>
-            <a:r>
-              <a:rPr lang="en-US" sz="1500" b="1" dirty="0">
-                <a:solidFill>
-                  <a:schemeClr val="tx1"/>
-                </a:solidFill>
-              </a:rPr>
-              <a:t>Pages</a:t>
-            </a:r>
-            <a:endParaRPr lang="en-US" sz="1500" dirty="0"/>
-          </a:p>
-        </p:txBody>
-      </p:sp>
-      <p:sp>
-        <p:nvSpPr>
-          <p:cNvPr id="6" name="Pages detail"/>
-          <p:cNvSpPr txBox="1"/>
-          <p:nvPr/>
-        </p:nvSpPr>
-        <p:spPr>
-          <a:xfrm>
-            <a:off x="1005840" y="2514600"/>
-            <a:ext cx="6492240" cy="347472"/>
-          </a:xfrm>
-          <a:prstGeom prst="rect">
-            <a:avLst/>
-          </a:prstGeom>
-          <a:noFill/>
-          <a:ln/>
-        </p:spPr>
-        <p:txBody>
-          <a:bodyPr wrap="square" lIns="0" tIns="0" rIns="0" bIns="0" rtlCol="0" anchor="t"/>
-          <a:lstStyle/>
-          <a:p>
-            <a:pPr indent="0" marL="0">
-              <a:buNone/>
-            </a:pPr>
-            <a:r>
-              <a:rPr lang="en-US" sz="1200" dirty="0">
-                <a:solidFill>
-                  <a:schemeClr val="tx2"/>
-                </a:solidFill>
-              </a:rPr>
-              <a:t>Every screen: HTML templates, three.js 3D home, Plotly charts. All bundled, runs offline</a:t>
-            </a:r>
-            <a:endParaRPr lang="en-US" sz="1200" dirty="0"/>
-          </a:p>
-        </p:txBody>
-      </p:sp>
-      <p:sp>
-        <p:nvSpPr>
-          <p:cNvPr id="7" name="Pages down"/>
-          <p:cNvSpPr/>
-          <p:nvPr/>
-        </p:nvSpPr>
-        <p:spPr>
-          <a:xfrm>
-            <a:off x="4251960" y="2944368"/>
-            <a:ext cx="0" cy="192024"/>
-          </a:xfrm>
-          <a:prstGeom prst="line">
-            <a:avLst/>
-          </a:prstGeom>
-          <a:noFill/>
-          <a:ln w="25400">
-            <a:solidFill>
-              <a:srgbClr val="8C8C8C"/>
-            </a:solidFill>
-            <a:prstDash val="solid"/>
-            <a:tailEnd type="triangle"/>
-          </a:ln>
-        </p:spPr>
-      </p:sp>
-      <p:sp>
-        <p:nvSpPr>
-          <p:cNvPr id="8" name="Pilot plug 1"/>
-          <p:cNvSpPr/>
-          <p:nvPr/>
-        </p:nvSpPr>
-        <p:spPr>
-          <a:xfrm>
-            <a:off x="8366760" y="2148840"/>
-            <a:ext cx="3044952" cy="731520"/>
-          </a:xfrm>
-          <a:prstGeom prst="roundRect">
-            <a:avLst>
-              <a:gd name="adj" fmla="val 12500"/>
-            </a:avLst>
-          </a:prstGeom>
-          <a:solidFill>
-            <a:srgbClr val="FFFFFF"/>
-          </a:solidFill>
-          <a:ln w="15875">
-            <a:solidFill>
-              <a:srgbClr val="D81921"/>
-            </a:solidFill>
-            <a:prstDash val="dash"/>
-          </a:ln>
-        </p:spPr>
-      </p:sp>
-      <p:sp>
-        <p:nvSpPr>
-          <p:cNvPr id="9" name="Pilot plug text 1"/>
-          <p:cNvSpPr txBox="1"/>
-          <p:nvPr/>
-        </p:nvSpPr>
-        <p:spPr>
-          <a:xfrm>
-            <a:off x="8503920" y="2176272"/>
-            <a:ext cx="2788920" cy="676656"/>
-          </a:xfrm>
-          <a:prstGeom prst="rect">
-            <a:avLst/>
-          </a:prstGeom>
-          <a:noFill/>
-          <a:ln/>
-        </p:spPr>
-        <p:txBody>
-          <a:bodyPr wrap="square" lIns="0" tIns="0" rIns="0" bIns="0" rtlCol="0" anchor="ctr"/>
-          <a:lstStyle/>
-          <a:p>
-            <a:pPr indent="0" marL="0">
-              <a:buNone/>
-            </a:pPr>
-            <a:r>
-              <a:rPr lang="en-US" sz="1150" dirty="0">
-                <a:solidFill>
-                  <a:schemeClr val="tx1"/>
-                </a:solidFill>
-              </a:rPr>
-              <a:t>Hosting: a WSGI server behind HTTPS on SDP's network</a:t>
-            </a:r>
-            <a:endParaRPr lang="en-US" sz="1150" dirty="0"/>
-          </a:p>
-        </p:txBody>
-      </p:sp>
-      <p:sp>
-        <p:nvSpPr>
-          <p:cNvPr id="10" name="Plug line 1"/>
-          <p:cNvSpPr/>
-          <p:nvPr/>
-        </p:nvSpPr>
-        <p:spPr>
-          <a:xfrm>
-            <a:off x="7744968" y="2514600"/>
-            <a:ext cx="603504" cy="0"/>
-          </a:xfrm>
-          <a:prstGeom prst="line">
-            <a:avLst/>
-          </a:prstGeom>
-          <a:noFill/>
-          <a:ln w="25400">
-            <a:solidFill>
-              <a:srgbClr val="D81921"/>
-            </a:solidFill>
-            <a:prstDash val="dash"/>
-          </a:ln>
-        </p:spPr>
-      </p:sp>
-      <p:sp>
-        <p:nvSpPr>
-          <p:cNvPr id="11" name="Web: Flask routes layer"/>
-          <p:cNvSpPr/>
-          <p:nvPr/>
-        </p:nvSpPr>
-        <p:spPr>
-          <a:xfrm>
-            <a:off x="777240" y="3154680"/>
-            <a:ext cx="6949440" cy="822960"/>
-          </a:xfrm>
-          <a:prstGeom prst="roundRect">
-            <a:avLst>
-              <a:gd name="adj" fmla="val 13333"/>
-            </a:avLst>
-          </a:prstGeom>
-          <a:solidFill>
-            <a:schemeClr val="bg2"/>
-          </a:solidFill>
-          <a:ln w="12700">
-            <a:solidFill>
-              <a:schemeClr val="bg2"/>
-            </a:solidFill>
-            <a:prstDash val="solid"/>
-          </a:ln>
-        </p:spPr>
-      </p:sp>
-      <p:sp>
-        <p:nvSpPr>
-          <p:cNvPr id="12" name="Web: Flask routes"/>
-          <p:cNvSpPr txBox="1"/>
-          <p:nvPr/>
-        </p:nvSpPr>
-        <p:spPr>
-          <a:xfrm>
-            <a:off x="1005840" y="3246120"/>
-            <a:ext cx="6492240" cy="320040"/>
-          </a:xfrm>
-          <a:prstGeom prst="rect">
-            <a:avLst/>
-          </a:prstGeom>
-          <a:noFill/>
-          <a:ln/>
-        </p:spPr>
-        <p:txBody>
-          <a:bodyPr wrap="square" lIns="0" tIns="0" rIns="0" bIns="0" rtlCol="0" anchor="t"/>
-          <a:lstStyle/>
-          <a:p>
-            <a:pPr indent="0" marL="0">
-              <a:buNone/>
-            </a:pPr>
-            <a:r>
-              <a:rPr lang="en-US" sz="1500" b="1" dirty="0">
-                <a:solidFill>
-                  <a:schemeClr val="tx1"/>
-                </a:solidFill>
-              </a:rPr>
-              <a:t>Web: Flask routes</a:t>
-            </a:r>
-            <a:endParaRPr lang="en-US" sz="1500" dirty="0"/>
-          </a:p>
-        </p:txBody>
-      </p:sp>
-      <p:sp>
-        <p:nvSpPr>
-          <p:cNvPr id="13" name="Web: Flask routes detail"/>
-          <p:cNvSpPr txBox="1"/>
-          <p:nvPr/>
-        </p:nvSpPr>
-        <p:spPr>
-          <a:xfrm>
-            <a:off x="1005840" y="3566160"/>
-            <a:ext cx="6492240" cy="347472"/>
-          </a:xfrm>
-          <a:prstGeom prst="rect">
-            <a:avLst/>
-          </a:prstGeom>
-          <a:noFill/>
-          <a:ln/>
-        </p:spPr>
-        <p:txBody>
-          <a:bodyPr wrap="square" lIns="0" tIns="0" rIns="0" bIns="0" rtlCol="0" anchor="t"/>
-          <a:lstStyle/>
-          <a:p>
-            <a:pPr indent="0" marL="0">
-              <a:buNone/>
-            </a:pPr>
-            <a:r>
-              <a:rPr lang="en-US" sz="1200" dirty="0">
-                <a:solidFill>
-                  <a:schemeClr val="tx2"/>
-                </a:solidFill>
-              </a:rPr>
-              <a:t>Every page and JSON API, the demo sign-in, request checks</a:t>
-            </a:r>
-            <a:endParaRPr lang="en-US" sz="1200" dirty="0"/>
-          </a:p>
-        </p:txBody>
-      </p:sp>
-      <p:sp>
-        <p:nvSpPr>
-          <p:cNvPr id="14" name="Web: Flask routes down"/>
-          <p:cNvSpPr/>
-          <p:nvPr/>
-        </p:nvSpPr>
-        <p:spPr>
-          <a:xfrm>
-            <a:off x="4251960" y="3995928"/>
-            <a:ext cx="0" cy="192024"/>
-          </a:xfrm>
-          <a:prstGeom prst="line">
-            <a:avLst/>
-          </a:prstGeom>
-          <a:noFill/>
-          <a:ln w="25400">
-            <a:solidFill>
-              <a:srgbClr val="8C8C8C"/>
-            </a:solidFill>
-            <a:prstDash val="solid"/>
-            <a:tailEnd type="triangle"/>
-          </a:ln>
-        </p:spPr>
-      </p:sp>
-      <p:sp>
-        <p:nvSpPr>
-          <p:cNvPr id="15" name="Pilot plug 2"/>
-          <p:cNvSpPr/>
-          <p:nvPr/>
-        </p:nvSpPr>
-        <p:spPr>
-          <a:xfrm>
-            <a:off x="8366760" y="3200400"/>
-            <a:ext cx="3044952" cy="731520"/>
-          </a:xfrm>
-          <a:prstGeom prst="roundRect">
-            <a:avLst>
-              <a:gd name="adj" fmla="val 12500"/>
-            </a:avLst>
-          </a:prstGeom>
-          <a:solidFill>
-            <a:srgbClr val="FFFFFF"/>
-          </a:solidFill>
-          <a:ln w="15875">
-            <a:solidFill>
-              <a:srgbClr val="D81921"/>
-            </a:solidFill>
-            <a:prstDash val="dash"/>
-          </a:ln>
-        </p:spPr>
-      </p:sp>
-      <p:sp>
-        <p:nvSpPr>
-          <p:cNvPr id="16" name="Pilot plug text 2"/>
-          <p:cNvSpPr txBox="1"/>
-          <p:nvPr/>
-        </p:nvSpPr>
-        <p:spPr>
-          <a:xfrm>
-            <a:off x="8503920" y="3227832"/>
-            <a:ext cx="2788920" cy="676656"/>
-          </a:xfrm>
-          <a:prstGeom prst="rect">
-            <a:avLst/>
-          </a:prstGeom>
-          <a:noFill/>
-          <a:ln/>
-        </p:spPr>
-        <p:txBody>
-          <a:bodyPr wrap="square" lIns="0" tIns="0" rIns="0" bIns="0" rtlCol="0" anchor="ctr"/>
-          <a:lstStyle/>
-          <a:p>
-            <a:pPr indent="0" marL="0">
-              <a:buNone/>
-            </a:pPr>
-            <a:r>
-              <a:rPr lang="en-US" sz="1150" dirty="0">
-                <a:solidFill>
-                  <a:schemeClr val="tx1"/>
-                </a:solidFill>
-              </a:rPr>
-              <a:t>SDP's own login replaces the demo sign-in</a:t>
-            </a:r>
-            <a:endParaRPr lang="en-US" sz="1150" dirty="0"/>
-          </a:p>
-        </p:txBody>
-      </p:sp>
-      <p:sp>
-        <p:nvSpPr>
-          <p:cNvPr id="17" name="Plug line 2"/>
-          <p:cNvSpPr/>
-          <p:nvPr/>
-        </p:nvSpPr>
-        <p:spPr>
-          <a:xfrm>
-            <a:off x="7744968" y="3566160"/>
-            <a:ext cx="603504" cy="0"/>
-          </a:xfrm>
-          <a:prstGeom prst="line">
-            <a:avLst/>
-          </a:prstGeom>
-          <a:noFill/>
-          <a:ln w="25400">
-            <a:solidFill>
-              <a:srgbClr val="D81921"/>
-            </a:solidFill>
-            <a:prstDash val="dash"/>
-          </a:ln>
-        </p:spPr>
-      </p:sp>
-      <p:sp>
-        <p:nvSpPr>
-          <p:cNvPr id="18" name="Rules and maths layer"/>
-          <p:cNvSpPr/>
-          <p:nvPr/>
-        </p:nvSpPr>
-        <p:spPr>
-          <a:xfrm>
-            <a:off x="777240" y="4206240"/>
-            <a:ext cx="6949440" cy="822960"/>
-          </a:xfrm>
-          <a:prstGeom prst="roundRect">
-            <a:avLst>
-              <a:gd name="adj" fmla="val 13333"/>
-            </a:avLst>
-          </a:prstGeom>
-          <a:solidFill>
-            <a:schemeClr val="bg2"/>
-          </a:solidFill>
-          <a:ln w="12700">
-            <a:solidFill>
-              <a:schemeClr val="bg2"/>
-            </a:solidFill>
-            <a:prstDash val="solid"/>
-          </a:ln>
-        </p:spPr>
-      </p:sp>
-      <p:sp>
-        <p:nvSpPr>
-          <p:cNvPr id="19" name="Rules and maths"/>
-          <p:cNvSpPr txBox="1"/>
-          <p:nvPr/>
-        </p:nvSpPr>
-        <p:spPr>
-          <a:xfrm>
-            <a:off x="1005840" y="4297680"/>
-            <a:ext cx="6492240" cy="320040"/>
-          </a:xfrm>
-          <a:prstGeom prst="rect">
-            <a:avLst/>
-          </a:prstGeom>
-          <a:noFill/>
-          <a:ln/>
-        </p:spPr>
-        <p:txBody>
-          <a:bodyPr wrap="square" lIns="0" tIns="0" rIns="0" bIns="0" rtlCol="0" anchor="t"/>
-          <a:lstStyle/>
-          <a:p>
-            <a:pPr indent="0" marL="0">
-              <a:buNone/>
-            </a:pPr>
-            <a:r>
-              <a:rPr lang="en-US" sz="1500" b="1" dirty="0">
-                <a:solidFill>
-                  <a:schemeClr val="tx1"/>
-                </a:solidFill>
-              </a:rPr>
-              <a:t>Rules and maths</a:t>
-            </a:r>
-            <a:endParaRPr lang="en-US" sz="1500" dirty="0"/>
-          </a:p>
-        </p:txBody>
-      </p:sp>
-      <p:sp>
-        <p:nvSpPr>
-          <p:cNvPr id="20" name="Rules and maths detail"/>
-          <p:cNvSpPr txBox="1"/>
-          <p:nvPr/>
-        </p:nvSpPr>
-        <p:spPr>
-          <a:xfrm>
-            <a:off x="1005840" y="4617720"/>
-            <a:ext cx="6492240" cy="347472"/>
-          </a:xfrm>
-          <a:prstGeom prst="rect">
-            <a:avLst/>
-          </a:prstGeom>
-          <a:noFill/>
-          <a:ln/>
-        </p:spPr>
-        <p:txBody>
-          <a:bodyPr wrap="square" lIns="0" tIns="0" rIns="0" bIns="0" rtlCol="0" anchor="t"/>
-          <a:lstStyle/>
-          <a:p>
-            <a:pPr indent="0" marL="0">
-              <a:buNone/>
-            </a:pPr>
-            <a:r>
-              <a:rPr lang="en-US" sz="1200" dirty="0">
-                <a:solidFill>
-                  <a:schemeClr val="tx2"/>
-                </a:solidFill>
-              </a:rPr>
-              <a:t>Impact and carbon maths, AI tagging, Neighbour Match, the township map</a:t>
-            </a:r>
-            <a:endParaRPr lang="en-US" sz="1200" dirty="0"/>
-          </a:p>
-        </p:txBody>
-      </p:sp>
-      <p:sp>
-        <p:nvSpPr>
-          <p:cNvPr id="21" name="Rules and maths down"/>
-          <p:cNvSpPr/>
-          <p:nvPr/>
-        </p:nvSpPr>
-        <p:spPr>
-          <a:xfrm>
-            <a:off x="4251960" y="5047488"/>
-            <a:ext cx="0" cy="192024"/>
-          </a:xfrm>
-          <a:prstGeom prst="line">
-            <a:avLst/>
-          </a:prstGeom>
-          <a:noFill/>
-          <a:ln w="25400">
-            <a:solidFill>
-              <a:srgbClr val="8C8C8C"/>
-            </a:solidFill>
-            <a:prstDash val="solid"/>
-            <a:tailEnd type="triangle"/>
-          </a:ln>
-        </p:spPr>
-      </p:sp>
-      <p:sp>
-        <p:nvSpPr>
-          <p:cNvPr id="22" name="Pilot plug 3"/>
-          <p:cNvSpPr/>
-          <p:nvPr/>
-        </p:nvSpPr>
-        <p:spPr>
-          <a:xfrm>
-            <a:off x="8366760" y="4251960"/>
-            <a:ext cx="3044952" cy="731520"/>
-          </a:xfrm>
-          <a:prstGeom prst="roundRect">
-            <a:avLst>
-              <a:gd name="adj" fmla="val 12500"/>
-            </a:avLst>
-          </a:prstGeom>
-          <a:solidFill>
-            <a:srgbClr val="FFFFFF"/>
-          </a:solidFill>
-          <a:ln w="15875">
-            <a:solidFill>
-              <a:srgbClr val="D81921"/>
-            </a:solidFill>
-            <a:prstDash val="dash"/>
-          </a:ln>
-        </p:spPr>
-      </p:sp>
-      <p:sp>
-        <p:nvSpPr>
-          <p:cNvPr id="23" name="Pilot plug text 3"/>
-          <p:cNvSpPr txBox="1"/>
-          <p:nvPr/>
-        </p:nvSpPr>
-        <p:spPr>
-          <a:xfrm>
-            <a:off x="8503920" y="4279392"/>
-            <a:ext cx="2788920" cy="676656"/>
-          </a:xfrm>
-          <a:prstGeom prst="rect">
-            <a:avLst/>
-          </a:prstGeom>
-          <a:noFill/>
-          <a:ln/>
-        </p:spPr>
-        <p:txBody>
-          <a:bodyPr wrap="square" lIns="0" tIns="0" rIns="0" bIns="0" rtlCol="0" anchor="ctr"/>
-          <a:lstStyle/>
-          <a:p>
-            <a:pPr indent="0" marL="0">
-              <a:buNone/>
-            </a:pPr>
-            <a:r>
-              <a:rPr lang="en-US" sz="1150" dirty="0">
-                <a:solidFill>
-                  <a:schemeClr val="tx1"/>
-                </a:solidFill>
-              </a:rPr>
-              <a:t>Claude API behind the tagger (optional; keyword rules as backup)</a:t>
-            </a:r>
-            <a:endParaRPr lang="en-US" sz="1150" dirty="0"/>
-          </a:p>
-        </p:txBody>
-      </p:sp>
-      <p:sp>
-        <p:nvSpPr>
-          <p:cNvPr id="24" name="Plug line 3"/>
-          <p:cNvSpPr/>
-          <p:nvPr/>
-        </p:nvSpPr>
-        <p:spPr>
-          <a:xfrm>
-            <a:off x="7744968" y="4617720"/>
-            <a:ext cx="603504" cy="0"/>
-          </a:xfrm>
-          <a:prstGeom prst="line">
-            <a:avLst/>
-          </a:prstGeom>
-          <a:noFill/>
-          <a:ln w="25400">
-            <a:solidFill>
-              <a:srgbClr val="D81921"/>
-            </a:solidFill>
-            <a:prstDash val="dash"/>
-          </a:ln>
-        </p:spPr>
-      </p:sp>
-      <p:sp>
-        <p:nvSpPr>
-          <p:cNvPr id="25" name="Data: SQLite layer"/>
-          <p:cNvSpPr/>
-          <p:nvPr/>
-        </p:nvSpPr>
-        <p:spPr>
-          <a:xfrm>
-            <a:off x="777240" y="5257800"/>
-            <a:ext cx="6949440" cy="822960"/>
-          </a:xfrm>
-          <a:prstGeom prst="roundRect">
-            <a:avLst>
-              <a:gd name="adj" fmla="val 13333"/>
-            </a:avLst>
-          </a:prstGeom>
-          <a:solidFill>
-            <a:schemeClr val="accent4"/>
-          </a:solidFill>
-          <a:ln w="12700">
-            <a:solidFill>
-              <a:schemeClr val="accent4"/>
-            </a:solidFill>
-            <a:prstDash val="solid"/>
-          </a:ln>
-        </p:spPr>
-      </p:sp>
-      <p:sp>
-        <p:nvSpPr>
-          <p:cNvPr id="26" name="Data: SQLite"/>
-          <p:cNvSpPr txBox="1"/>
-          <p:nvPr/>
-        </p:nvSpPr>
-        <p:spPr>
-          <a:xfrm>
-            <a:off x="1005840" y="5349240"/>
-            <a:ext cx="6492240" cy="320040"/>
-          </a:xfrm>
-          <a:prstGeom prst="rect">
-            <a:avLst/>
-          </a:prstGeom>
-          <a:noFill/>
-          <a:ln/>
-        </p:spPr>
-        <p:txBody>
-          <a:bodyPr wrap="square" lIns="0" tIns="0" rIns="0" bIns="0" rtlCol="0" anchor="t"/>
-          <a:lstStyle/>
-          <a:p>
-            <a:pPr indent="0" marL="0">
-              <a:buNone/>
-            </a:pPr>
-            <a:r>
-              <a:rPr lang="en-US" sz="1500" b="1" dirty="0">
-                <a:solidFill>
-                  <a:schemeClr val="bg1"/>
-                </a:solidFill>
-              </a:rPr>
-              <a:t>Data: SQLite</a:t>
-            </a:r>
-            <a:endParaRPr lang="en-US" sz="1500" dirty="0"/>
-          </a:p>
-        </p:txBody>
-      </p:sp>
-      <p:sp>
-        <p:nvSpPr>
-          <p:cNvPr id="27" name="Data: SQLite detail"/>
-          <p:cNvSpPr txBox="1"/>
-          <p:nvPr/>
-        </p:nvSpPr>
-        <p:spPr>
-          <a:xfrm>
-            <a:off x="1005840" y="5669280"/>
-            <a:ext cx="6492240" cy="347472"/>
-          </a:xfrm>
-          <a:prstGeom prst="rect">
-            <a:avLst/>
-          </a:prstGeom>
-          <a:noFill/>
-          <a:ln/>
-        </p:spPr>
-        <p:txBody>
-          <a:bodyPr wrap="square" lIns="0" tIns="0" rIns="0" bIns="0" rtlCol="0" anchor="t"/>
-          <a:lstStyle/>
-          <a:p>
-            <a:pPr indent="0" marL="0">
-              <a:buNone/>
-            </a:pPr>
-            <a:r>
-              <a:rPr lang="en-US" sz="1200" dirty="0">
-                <a:solidFill>
-                  <a:schemeClr val="bg1"/>
-                </a:solidFill>
-              </a:rPr>
-              <a:t>9 tables with keys and checks; every save is all or nothing</a:t>
-            </a:r>
-            <a:endParaRPr lang="en-US" sz="1200" dirty="0"/>
-          </a:p>
-        </p:txBody>
-      </p:sp>
-      <p:sp>
-        <p:nvSpPr>
-          <p:cNvPr id="28" name="Pilot plug 4"/>
-          <p:cNvSpPr/>
-          <p:nvPr/>
-        </p:nvSpPr>
-        <p:spPr>
-          <a:xfrm>
-            <a:off x="8366760" y="5303520"/>
-            <a:ext cx="3044952" cy="731520"/>
-          </a:xfrm>
-          <a:prstGeom prst="roundRect">
-            <a:avLst>
-              <a:gd name="adj" fmla="val 12500"/>
-            </a:avLst>
-          </a:prstGeom>
-          <a:solidFill>
-            <a:srgbClr val="FFFFFF"/>
-          </a:solidFill>
-          <a:ln w="15875">
-            <a:solidFill>
-              <a:srgbClr val="D81921"/>
-            </a:solidFill>
-            <a:prstDash val="dash"/>
-          </a:ln>
-        </p:spPr>
-      </p:sp>
-      <p:sp>
-        <p:nvSpPr>
-          <p:cNvPr id="29" name="Pilot plug text 4"/>
-          <p:cNvSpPr txBox="1"/>
-          <p:nvPr/>
-        </p:nvSpPr>
-        <p:spPr>
-          <a:xfrm>
-            <a:off x="8503920" y="5330952"/>
-            <a:ext cx="2788920" cy="676656"/>
-          </a:xfrm>
-          <a:prstGeom prst="rect">
-            <a:avLst/>
-          </a:prstGeom>
-          <a:noFill/>
-          <a:ln/>
-        </p:spPr>
-        <p:txBody>
-          <a:bodyPr wrap="square" lIns="0" tIns="0" rIns="0" bIns="0" rtlCol="0" anchor="ctr"/>
-          <a:lstStyle/>
-          <a:p>
-            <a:pPr indent="0" marL="0">
-              <a:buNone/>
-            </a:pPr>
-            <a:r>
-              <a:rPr lang="en-US" sz="1150" dirty="0">
-                <a:solidFill>
-                  <a:schemeClr val="tx1"/>
-                </a:solidFill>
-              </a:rPr>
-              <a:t>SDP's sales and renovation systems feed it; a server database can replace SQLite</a:t>
-            </a:r>
-            <a:endParaRPr lang="en-US" sz="1150" dirty="0"/>
-          </a:p>
-        </p:txBody>
-      </p:sp>
-      <p:sp>
-        <p:nvSpPr>
-          <p:cNvPr id="30" name="Plug line 4"/>
-          <p:cNvSpPr/>
-          <p:nvPr/>
-        </p:nvSpPr>
-        <p:spPr>
-          <a:xfrm>
-            <a:off x="7744968" y="5669280"/>
-            <a:ext cx="603504" cy="0"/>
-          </a:xfrm>
-          <a:prstGeom prst="line">
-            <a:avLst/>
-          </a:prstGeom>
-          <a:noFill/>
-          <a:ln w="25400">
-            <a:solidFill>
-              <a:srgbClr val="D81921"/>
-            </a:solidFill>
-            <a:prstDash val="dash"/>
-          </a:ln>
-        </p:spPr>
-      </p:sp>
-      <p:sp>
-        <p:nvSpPr>
-          <p:cNvPr id="31" name="Text 29"/>
-          <p:cNvSpPr txBox="1"/>
-          <p:nvPr/>
-        </p:nvSpPr>
-        <p:spPr>
-          <a:xfrm>
-            <a:off x="8366760" y="1828800"/>
-            <a:ext cx="3044952" cy="237744"/>
-          </a:xfrm>
-          <a:prstGeom prst="rect">
-            <a:avLst/>
-          </a:prstGeom>
-          <a:noFill/>
-          <a:ln/>
-        </p:spPr>
-        <p:txBody>
-          <a:bodyPr wrap="square" lIns="0" tIns="0" rIns="0" bIns="0" rtlCol="0" anchor="t"/>
-          <a:lstStyle/>
-          <a:p>
-            <a:pPr indent="0" marL="0">
-              <a:buNone/>
-            </a:pPr>
-            <a:r>
-              <a:rPr lang="en-US" sz="1100" b="1" spc="100" kern="0" dirty="0">
-                <a:solidFill>
-                  <a:schemeClr val="accent1"/>
-                </a:solidFill>
-              </a:rPr>
-              <a:t>FOR A REAL PILOT</a:t>
-            </a:r>
-            <a:endParaRPr lang="en-US" sz="1100" dirty="0"/>
-          </a:p>
-        </p:txBody>
-      </p:sp>
-      <p:sp>
-        <p:nvSpPr>
-          <p:cNvPr id="32" name="Architecture link"/>
-          <p:cNvSpPr txBox="1"/>
-          <p:nvPr/>
-        </p:nvSpPr>
-        <p:spPr>
-          <a:xfrm>
-            <a:off x="777240" y="6263640"/>
-            <a:ext cx="10634472" cy="274320"/>
-          </a:xfrm>
-          <a:prstGeom prst="rect">
-            <a:avLst/>
-          </a:prstGeom>
-          <a:noFill/>
-          <a:ln/>
-        </p:spPr>
-        <p:txBody>
-          <a:bodyPr wrap="square" lIns="0" tIns="0" rIns="0" bIns="0" rtlCol="0" anchor="t"/>
-          <a:lstStyle/>
-          <a:p>
-            <a:pPr indent="0" marL="0">
-              <a:buNone/>
-            </a:pPr>
-            <a:r>
-              <a:rPr lang="en-US" sz="1100" dirty="0">
-                <a:solidFill>
-                  <a:schemeClr val="tx2"/>
-                </a:solidFill>
-              </a:rPr>
-              <a:t>Full diagrams: docs/ARCHITECTURE.md in the code repository.</a:t>
-            </a:r>
-            <a:endParaRPr lang="en-US" sz="1100" dirty="0"/>
-          </a:p>
-        </p:txBody>
-      </p:sp>
+      <p:pic>
+        <p:nvPicPr>
+          <p:cNvPr id="3" name="Architecture diagram" descr="System architecture: SDP staff, homeowners and buyers use five pages in a browser; four layers (pages, Flask web, rules and maths, one SQLite database); Claude API optional for AI tagging; hosting, SDP login and SDP systems added for a real pilot">    </p:cNvPr>
+          <p:cNvPicPr>
+            <a:picLocks noChangeAspect="1"/>
+          </p:cNvPicPr>
+          <p:nvPr/>
+        </p:nvPicPr>
+        <p:blipFill>
+          <a:blip r:embed="rId1"/>
+          <a:stretch>
+            <a:fillRect/>
+          </a:stretch>
+        </p:blipFill>
+        <p:spPr>
+          <a:xfrm>
+            <a:off x="777240" y="1417320"/>
+            <a:ext cx="10634472" cy="4984909"/>
+          </a:xfrm>
+          <a:prstGeom prst="rect">
+            <a:avLst/>
+          </a:prstGeom>
+        </p:spPr>
+      </p:pic>
     </p:spTree>
   </p:cSld>
   <p:clrMapOvr>
